--- a/slides/20251028.pptx
+++ b/slides/20251028.pptx
@@ -3486,7 +3486,7 @@
                 <a:latin typeface="Arial" panose="020B0604020202020204" pitchFamily="34" charset="0"/>
                 <a:cs typeface="Arial" panose="020B0604020202020204" pitchFamily="34" charset="0"/>
               </a:rPr>
-              <a:t>ProCo workflow:</a:t>
+              <a:t>Baseline ProCo workflow:</a:t>
             </a:r>
           </a:p>
         </p:txBody>
@@ -4628,18 +4628,25 @@
               <a:t>Most recent methods rely on RAG or other external resources. In contrast, we could tell story that our approach focuses on </a:t>
             </a:r>
             <a:r>
-              <a:rPr lang="en-US" altLang="zh-CN" sz="2000" b="1" dirty="0">
+              <a:rPr lang="en-US" altLang="zh-CN" sz="2000" b="1">
                 <a:latin typeface="Arial" panose="020B0604020202020204" pitchFamily="34" charset="0"/>
                 <a:cs typeface="Arial" panose="020B0604020202020204" pitchFamily="34" charset="0"/>
               </a:rPr>
               <a:t>zero-resource</a:t>
             </a:r>
             <a:r>
-              <a:rPr lang="en-US" altLang="zh-CN" sz="2000" dirty="0">
-                <a:latin typeface="Arial" panose="020B0604020202020204" pitchFamily="34" charset="0"/>
-                <a:cs typeface="Arial" panose="020B0604020202020204" pitchFamily="34" charset="0"/>
-              </a:rPr>
-              <a:t> self-repair, a direction that has received little attention in recent years.</a:t>
+              <a:rPr lang="en-US" altLang="zh-CN" sz="2000">
+                <a:latin typeface="Arial" panose="020B0604020202020204" pitchFamily="34" charset="0"/>
+                <a:cs typeface="Arial" panose="020B0604020202020204" pitchFamily="34" charset="0"/>
+              </a:rPr>
+              <a:t> self-correction, </a:t>
+            </a:r>
+            <a:r>
+              <a:rPr lang="en-US" altLang="zh-CN" sz="2000" dirty="0">
+                <a:latin typeface="Arial" panose="020B0604020202020204" pitchFamily="34" charset="0"/>
+                <a:cs typeface="Arial" panose="020B0604020202020204" pitchFamily="34" charset="0"/>
+              </a:rPr>
+              <a:t>a direction that has received little attention in recent years.</a:t>
             </a:r>
           </a:p>
           <a:p>

--- a/slides/20251028.pptx
+++ b/slides/20251028.pptx
@@ -6,9 +6,10 @@
   </p:sldMasterIdLst>
   <p:sldIdLst>
     <p:sldId id="260" r:id="rId2"/>
-    <p:sldId id="257" r:id="rId3"/>
-    <p:sldId id="258" r:id="rId4"/>
-    <p:sldId id="259" r:id="rId5"/>
+    <p:sldId id="261" r:id="rId3"/>
+    <p:sldId id="257" r:id="rId4"/>
+    <p:sldId id="258" r:id="rId5"/>
+    <p:sldId id="259" r:id="rId6"/>
   </p:sldIdLst>
   <p:sldSz cx="12192000" cy="6858000"/>
   <p:notesSz cx="6858000" cy="9144000"/>
@@ -262,7 +263,7 @@
           <a:p>
             <a:fld id="{3F567BA6-CBC2-4FF0-810E-3ED1BF2C4381}" type="datetimeFigureOut">
               <a:rPr lang="zh-CN" altLang="en-US" smtClean="0"/>
-              <a:t>2025/10/28</a:t>
+              <a:t>2025/11/7</a:t>
             </a:fld>
             <a:endParaRPr lang="zh-CN" altLang="en-US"/>
           </a:p>
@@ -460,7 +461,7 @@
           <a:p>
             <a:fld id="{3F567BA6-CBC2-4FF0-810E-3ED1BF2C4381}" type="datetimeFigureOut">
               <a:rPr lang="zh-CN" altLang="en-US" smtClean="0"/>
-              <a:t>2025/10/28</a:t>
+              <a:t>2025/11/7</a:t>
             </a:fld>
             <a:endParaRPr lang="zh-CN" altLang="en-US"/>
           </a:p>
@@ -668,7 +669,7 @@
           <a:p>
             <a:fld id="{3F567BA6-CBC2-4FF0-810E-3ED1BF2C4381}" type="datetimeFigureOut">
               <a:rPr lang="zh-CN" altLang="en-US" smtClean="0"/>
-              <a:t>2025/10/28</a:t>
+              <a:t>2025/11/7</a:t>
             </a:fld>
             <a:endParaRPr lang="zh-CN" altLang="en-US"/>
           </a:p>
@@ -866,7 +867,7 @@
           <a:p>
             <a:fld id="{3F567BA6-CBC2-4FF0-810E-3ED1BF2C4381}" type="datetimeFigureOut">
               <a:rPr lang="zh-CN" altLang="en-US" smtClean="0"/>
-              <a:t>2025/10/28</a:t>
+              <a:t>2025/11/7</a:t>
             </a:fld>
             <a:endParaRPr lang="zh-CN" altLang="en-US"/>
           </a:p>
@@ -1141,7 +1142,7 @@
           <a:p>
             <a:fld id="{3F567BA6-CBC2-4FF0-810E-3ED1BF2C4381}" type="datetimeFigureOut">
               <a:rPr lang="zh-CN" altLang="en-US" smtClean="0"/>
-              <a:t>2025/10/28</a:t>
+              <a:t>2025/11/7</a:t>
             </a:fld>
             <a:endParaRPr lang="zh-CN" altLang="en-US"/>
           </a:p>
@@ -1406,7 +1407,7 @@
           <a:p>
             <a:fld id="{3F567BA6-CBC2-4FF0-810E-3ED1BF2C4381}" type="datetimeFigureOut">
               <a:rPr lang="zh-CN" altLang="en-US" smtClean="0"/>
-              <a:t>2025/10/28</a:t>
+              <a:t>2025/11/7</a:t>
             </a:fld>
             <a:endParaRPr lang="zh-CN" altLang="en-US"/>
           </a:p>
@@ -1818,7 +1819,7 @@
           <a:p>
             <a:fld id="{3F567BA6-CBC2-4FF0-810E-3ED1BF2C4381}" type="datetimeFigureOut">
               <a:rPr lang="zh-CN" altLang="en-US" smtClean="0"/>
-              <a:t>2025/10/28</a:t>
+              <a:t>2025/11/7</a:t>
             </a:fld>
             <a:endParaRPr lang="zh-CN" altLang="en-US"/>
           </a:p>
@@ -1959,7 +1960,7 @@
           <a:p>
             <a:fld id="{3F567BA6-CBC2-4FF0-810E-3ED1BF2C4381}" type="datetimeFigureOut">
               <a:rPr lang="zh-CN" altLang="en-US" smtClean="0"/>
-              <a:t>2025/10/28</a:t>
+              <a:t>2025/11/7</a:t>
             </a:fld>
             <a:endParaRPr lang="zh-CN" altLang="en-US"/>
           </a:p>
@@ -2072,7 +2073,7 @@
           <a:p>
             <a:fld id="{3F567BA6-CBC2-4FF0-810E-3ED1BF2C4381}" type="datetimeFigureOut">
               <a:rPr lang="zh-CN" altLang="en-US" smtClean="0"/>
-              <a:t>2025/10/28</a:t>
+              <a:t>2025/11/7</a:t>
             </a:fld>
             <a:endParaRPr lang="zh-CN" altLang="en-US"/>
           </a:p>
@@ -2383,7 +2384,7 @@
           <a:p>
             <a:fld id="{3F567BA6-CBC2-4FF0-810E-3ED1BF2C4381}" type="datetimeFigureOut">
               <a:rPr lang="zh-CN" altLang="en-US" smtClean="0"/>
-              <a:t>2025/10/28</a:t>
+              <a:t>2025/11/7</a:t>
             </a:fld>
             <a:endParaRPr lang="zh-CN" altLang="en-US"/>
           </a:p>
@@ -2671,7 +2672,7 @@
           <a:p>
             <a:fld id="{3F567BA6-CBC2-4FF0-810E-3ED1BF2C4381}" type="datetimeFigureOut">
               <a:rPr lang="zh-CN" altLang="en-US" smtClean="0"/>
-              <a:t>2025/10/28</a:t>
+              <a:t>2025/11/7</a:t>
             </a:fld>
             <a:endParaRPr lang="zh-CN" altLang="en-US"/>
           </a:p>
@@ -2912,7 +2913,7 @@
           <a:p>
             <a:fld id="{3F567BA6-CBC2-4FF0-810E-3ED1BF2C4381}" type="datetimeFigureOut">
               <a:rPr lang="zh-CN" altLang="en-US" smtClean="0"/>
-              <a:t>2025/10/28</a:t>
+              <a:t>2025/11/7</a:t>
             </a:fld>
             <a:endParaRPr lang="zh-CN" altLang="en-US"/>
           </a:p>
@@ -3344,7 +3345,7 @@
         <p:spPr>
           <a:xfrm>
             <a:off x="479719" y="151179"/>
-            <a:ext cx="11219222" cy="3662541"/>
+            <a:ext cx="11219222" cy="6309420"/>
           </a:xfrm>
           <a:prstGeom prst="rect">
             <a:avLst/>
@@ -3362,52 +3363,28 @@
                 <a:latin typeface="Arial" panose="020B0604020202020204" pitchFamily="34" charset="0"/>
                 <a:cs typeface="Arial" panose="020B0604020202020204" pitchFamily="34" charset="0"/>
               </a:rPr>
-              <a:t>Workflow:</a:t>
-            </a:r>
-          </a:p>
-          <a:p>
-            <a:r>
-              <a:rPr lang="en-US" altLang="zh-CN" sz="2000" dirty="0">
-                <a:latin typeface="Arial" panose="020B0604020202020204" pitchFamily="34" charset="0"/>
-                <a:cs typeface="Arial" panose="020B0604020202020204" pitchFamily="34" charset="0"/>
-              </a:rPr>
-              <a:t>Question to LLM -&gt; </a:t>
-            </a:r>
-            <a:r>
-              <a:rPr lang="en-US" altLang="zh-CN" sz="2000" dirty="0" err="1">
-                <a:latin typeface="Arial" panose="020B0604020202020204" pitchFamily="34" charset="0"/>
-                <a:cs typeface="Arial" panose="020B0604020202020204" pitchFamily="34" charset="0"/>
-              </a:rPr>
-              <a:t>base_response</a:t>
-            </a:r>
-            <a:r>
-              <a:rPr lang="en-US" altLang="zh-CN" sz="2000" dirty="0">
-                <a:latin typeface="Arial" panose="020B0604020202020204" pitchFamily="34" charset="0"/>
-                <a:cs typeface="Arial" panose="020B0604020202020204" pitchFamily="34" charset="0"/>
-              </a:rPr>
-              <a:t> -&gt; prompt with </a:t>
-            </a:r>
-            <a:r>
-              <a:rPr lang="en-US" altLang="zh-CN" sz="2000" b="1" dirty="0">
-                <a:latin typeface="Arial" panose="020B0604020202020204" pitchFamily="34" charset="0"/>
-                <a:cs typeface="Arial" panose="020B0604020202020204" pitchFamily="34" charset="0"/>
-              </a:rPr>
-              <a:t>fault injection </a:t>
-            </a:r>
-            <a:r>
-              <a:rPr lang="en-US" altLang="zh-CN" sz="2000" dirty="0">
-                <a:latin typeface="Arial" panose="020B0604020202020204" pitchFamily="34" charset="0"/>
-                <a:cs typeface="Arial" panose="020B0604020202020204" pitchFamily="34" charset="0"/>
-              </a:rPr>
-              <a:t>-&gt; </a:t>
-            </a:r>
-            <a:r>
-              <a:rPr lang="en-US" altLang="zh-CN" sz="2000" dirty="0" err="1">
-                <a:latin typeface="Arial" panose="020B0604020202020204" pitchFamily="34" charset="0"/>
-                <a:cs typeface="Arial" panose="020B0604020202020204" pitchFamily="34" charset="0"/>
-              </a:rPr>
-              <a:t>final_answer</a:t>
-            </a:r>
+              <a:t>Idea:</a:t>
+            </a:r>
+          </a:p>
+          <a:p>
+            <a:r>
+              <a:rPr lang="en-US" altLang="zh-CN" sz="2000" dirty="0">
+                <a:latin typeface="Arial" panose="020B0604020202020204" pitchFamily="34" charset="0"/>
+                <a:cs typeface="Arial" panose="020B0604020202020204" pitchFamily="34" charset="0"/>
+              </a:rPr>
+              <a:t>Inject the assumption of possible faults (hallucinations or factual errors) in a follow‑up prompt to trigger a self‑fact‑checking cycle.</a:t>
+            </a:r>
+          </a:p>
+          <a:p>
+            <a:r>
+              <a:rPr lang="en-US" altLang="zh-CN" sz="2000" dirty="0">
+                <a:latin typeface="Arial" panose="020B0604020202020204" pitchFamily="34" charset="0"/>
+                <a:cs typeface="Arial" panose="020B0604020202020204" pitchFamily="34" charset="0"/>
+              </a:rPr>
+              <a:t>The LLM re‑examines the original answer under this “fault injection” premise and produces a concise corrected final answer.</a:t>
+            </a:r>
+          </a:p>
+          <a:p>
             <a:endParaRPr lang="en-US" altLang="zh-CN" sz="2000" dirty="0">
               <a:latin typeface="Arial" panose="020B0604020202020204" pitchFamily="34" charset="0"/>
               <a:cs typeface="Arial" panose="020B0604020202020204" pitchFamily="34" charset="0"/>
@@ -3415,14 +3392,56 @@
           </a:p>
           <a:p>
             <a:r>
-              <a:rPr lang="en-US" altLang="zh-CN" sz="2000" dirty="0">
-                <a:latin typeface="Arial" panose="020B0604020202020204" pitchFamily="34" charset="0"/>
-                <a:cs typeface="Arial" panose="020B0604020202020204" pitchFamily="34" charset="0"/>
-              </a:rPr>
-              <a:t>(could also use mutations in recheck process, which surely can improve effectiveness)</a:t>
-            </a:r>
-          </a:p>
-          <a:p>
+              <a:rPr lang="en-US" altLang="zh-CN" sz="3200" dirty="0">
+                <a:latin typeface="Arial" panose="020B0604020202020204" pitchFamily="34" charset="0"/>
+                <a:cs typeface="Arial" panose="020B0604020202020204" pitchFamily="34" charset="0"/>
+              </a:rPr>
+              <a:t>Workflow:</a:t>
+            </a:r>
+          </a:p>
+          <a:p>
+            <a:r>
+              <a:rPr lang="en-US" altLang="zh-CN" sz="2000" dirty="0">
+                <a:latin typeface="Arial" panose="020B0604020202020204" pitchFamily="34" charset="0"/>
+                <a:cs typeface="Arial" panose="020B0604020202020204" pitchFamily="34" charset="0"/>
+              </a:rPr>
+              <a:t>Question to LLM -&gt; </a:t>
+            </a:r>
+            <a:r>
+              <a:rPr lang="en-US" altLang="zh-CN" sz="2000" dirty="0" err="1">
+                <a:latin typeface="Arial" panose="020B0604020202020204" pitchFamily="34" charset="0"/>
+                <a:cs typeface="Arial" panose="020B0604020202020204" pitchFamily="34" charset="0"/>
+              </a:rPr>
+              <a:t>base_response</a:t>
+            </a:r>
+            <a:r>
+              <a:rPr lang="en-US" altLang="zh-CN" sz="2000" dirty="0">
+                <a:latin typeface="Arial" panose="020B0604020202020204" pitchFamily="34" charset="0"/>
+                <a:cs typeface="Arial" panose="020B0604020202020204" pitchFamily="34" charset="0"/>
+              </a:rPr>
+              <a:t> -&gt; prompt with </a:t>
+            </a:r>
+            <a:r>
+              <a:rPr lang="en-US" altLang="zh-CN" sz="2000" b="1" dirty="0">
+                <a:latin typeface="Arial" panose="020B0604020202020204" pitchFamily="34" charset="0"/>
+                <a:cs typeface="Arial" panose="020B0604020202020204" pitchFamily="34" charset="0"/>
+              </a:rPr>
+              <a:t>fault injection </a:t>
+            </a:r>
+            <a:r>
+              <a:rPr lang="en-US" altLang="zh-CN" sz="2000" dirty="0">
+                <a:latin typeface="Arial" panose="020B0604020202020204" pitchFamily="34" charset="0"/>
+                <a:cs typeface="Arial" panose="020B0604020202020204" pitchFamily="34" charset="0"/>
+              </a:rPr>
+              <a:t>-&gt; </a:t>
+            </a:r>
+            <a:r>
+              <a:rPr lang="en-US" altLang="zh-CN" sz="2000" dirty="0" err="1">
+                <a:latin typeface="Arial" panose="020B0604020202020204" pitchFamily="34" charset="0"/>
+                <a:cs typeface="Arial" panose="020B0604020202020204" pitchFamily="34" charset="0"/>
+              </a:rPr>
+              <a:t>final_answer</a:t>
+            </a:r>
             <a:endParaRPr lang="en-US" altLang="zh-CN" sz="2000" dirty="0">
               <a:latin typeface="Arial" panose="020B0604020202020204" pitchFamily="34" charset="0"/>
               <a:cs typeface="Arial" panose="020B0604020202020204" pitchFamily="34" charset="0"/>
@@ -3434,6 +3453,21 @@
                 <a:latin typeface="Arial" panose="020B0604020202020204" pitchFamily="34" charset="0"/>
                 <a:cs typeface="Arial" panose="020B0604020202020204" pitchFamily="34" charset="0"/>
               </a:rPr>
+              <a:t>(Borui: could also use mutations in recheck process, which surely can improve effectiveness)</a:t>
+            </a:r>
+          </a:p>
+          <a:p>
+            <a:endParaRPr lang="en-US" altLang="zh-CN" sz="2000" dirty="0">
+              <a:latin typeface="Arial" panose="020B0604020202020204" pitchFamily="34" charset="0"/>
+              <a:cs typeface="Arial" panose="020B0604020202020204" pitchFamily="34" charset="0"/>
+            </a:endParaRPr>
+          </a:p>
+          <a:p>
+            <a:r>
+              <a:rPr lang="en-US" altLang="zh-CN" sz="2000" dirty="0">
+                <a:latin typeface="Arial" panose="020B0604020202020204" pitchFamily="34" charset="0"/>
+                <a:cs typeface="Arial" panose="020B0604020202020204" pitchFamily="34" charset="0"/>
+              </a:rPr>
               <a:t>Prompt example:</a:t>
             </a:r>
           </a:p>
@@ -3477,50 +3511,32 @@
                 <a:latin typeface="Arial" panose="020B0604020202020204" pitchFamily="34" charset="0"/>
                 <a:cs typeface="Arial" panose="020B0604020202020204" pitchFamily="34" charset="0"/>
               </a:rPr>
-              <a:t>"""</a:t>
-            </a:r>
-          </a:p>
-          <a:p>
-            <a:r>
-              <a:rPr lang="en-US" altLang="zh-CN" sz="2000" dirty="0">
-                <a:latin typeface="Arial" panose="020B0604020202020204" pitchFamily="34" charset="0"/>
-                <a:cs typeface="Arial" panose="020B0604020202020204" pitchFamily="34" charset="0"/>
-              </a:rPr>
-              <a:t>Baseline ProCo workflow:</a:t>
-            </a:r>
-          </a:p>
-        </p:txBody>
-      </p:sp>
-      <p:pic>
-        <p:nvPicPr>
-          <p:cNvPr id="9" name="图片 8">
-            <a:extLst>
-              <a:ext uri="{FF2B5EF4-FFF2-40B4-BE49-F238E27FC236}">
-                <a16:creationId xmlns:a16="http://schemas.microsoft.com/office/drawing/2014/main" id="{EE8FB455-5BC9-35EC-B29E-233E6A540E74}"/>
-              </a:ext>
-            </a:extLst>
-          </p:cNvPr>
-          <p:cNvPicPr>
-            <a:picLocks noChangeAspect="1"/>
-          </p:cNvPicPr>
-          <p:nvPr/>
-        </p:nvPicPr>
-        <p:blipFill>
-          <a:blip r:embed="rId2"/>
-          <a:stretch>
-            <a:fillRect/>
-          </a:stretch>
-        </p:blipFill>
-        <p:spPr>
-          <a:xfrm>
-            <a:off x="479719" y="3813720"/>
-            <a:ext cx="10609622" cy="3045780"/>
-          </a:xfrm>
-          <a:prstGeom prst="rect">
-            <a:avLst/>
-          </a:prstGeom>
-        </p:spPr>
-      </p:pic>
+              <a:t>""“</a:t>
+            </a:r>
+          </a:p>
+          <a:p>
+            <a:endParaRPr lang="en-US" altLang="zh-CN" sz="2000" dirty="0">
+              <a:solidFill>
+                <a:srgbClr val="00B050"/>
+              </a:solidFill>
+              <a:latin typeface="Arial" panose="020B0604020202020204" pitchFamily="34" charset="0"/>
+              <a:cs typeface="Arial" panose="020B0604020202020204" pitchFamily="34" charset="0"/>
+            </a:endParaRPr>
+          </a:p>
+          <a:p>
+            <a:r>
+              <a:rPr lang="en-US" altLang="zh-CN" sz="2000" dirty="0">
+                <a:solidFill>
+                  <a:srgbClr val="FF0000"/>
+                </a:solidFill>
+                <a:latin typeface="Arial" panose="020B0604020202020204" pitchFamily="34" charset="0"/>
+                <a:cs typeface="Arial" panose="020B0604020202020204" pitchFamily="34" charset="0"/>
+              </a:rPr>
+              <a:t>(Jie: We should say this is an empirical study, rather than mentioning our base idea, or that would be too simple for a conference paper)</a:t>
+            </a:r>
+          </a:p>
+        </p:txBody>
+      </p:sp>
     </p:spTree>
     <p:extLst>
       <p:ext uri="{BB962C8B-B14F-4D97-AF65-F5344CB8AC3E}">
@@ -3535,6 +3551,215 @@
 </file>
 
 <file path=ppt/slides/slide2.xml><?xml version="1.0" encoding="utf-8"?>
+<p:sld xmlns:a="http://schemas.openxmlformats.org/drawingml/2006/main" xmlns:r="http://schemas.openxmlformats.org/officeDocument/2006/relationships" xmlns:p="http://schemas.openxmlformats.org/presentationml/2006/main">
+  <p:cSld>
+    <p:spTree>
+      <p:nvGrpSpPr>
+        <p:cNvPr id="1" name="">
+          <a:extLst>
+            <a:ext uri="{FF2B5EF4-FFF2-40B4-BE49-F238E27FC236}">
+              <a16:creationId xmlns:a16="http://schemas.microsoft.com/office/drawing/2014/main" id="{81802CF2-3B27-A241-3FBF-A866299B1A75}"/>
+            </a:ext>
+          </a:extLst>
+        </p:cNvPr>
+        <p:cNvGrpSpPr/>
+        <p:nvPr/>
+      </p:nvGrpSpPr>
+      <p:grpSpPr>
+        <a:xfrm>
+          <a:off x="0" y="0"/>
+          <a:ext cx="0" cy="0"/>
+          <a:chOff x="0" y="0"/>
+          <a:chExt cx="0" cy="0"/>
+        </a:xfrm>
+      </p:grpSpPr>
+      <p:sp>
+        <p:nvSpPr>
+          <p:cNvPr id="4" name="文本框 3">
+            <a:extLst>
+              <a:ext uri="{FF2B5EF4-FFF2-40B4-BE49-F238E27FC236}">
+                <a16:creationId xmlns:a16="http://schemas.microsoft.com/office/drawing/2014/main" id="{CC5DEC9B-2475-63EE-2956-66364BD805A7}"/>
+              </a:ext>
+            </a:extLst>
+          </p:cNvPr>
+          <p:cNvSpPr txBox="1"/>
+          <p:nvPr/>
+        </p:nvSpPr>
+        <p:spPr>
+          <a:xfrm>
+            <a:off x="479719" y="151179"/>
+            <a:ext cx="11219222" cy="4770537"/>
+          </a:xfrm>
+          <a:prstGeom prst="rect">
+            <a:avLst/>
+          </a:prstGeom>
+          <a:noFill/>
+        </p:spPr>
+        <p:txBody>
+          <a:bodyPr wrap="square" rtlCol="0">
+            <a:spAutoFit/>
+          </a:bodyPr>
+          <a:lstStyle/>
+          <a:p>
+            <a:r>
+              <a:rPr lang="en-US" altLang="zh-CN" sz="3200" dirty="0">
+                <a:latin typeface="Arial" panose="020B0604020202020204" pitchFamily="34" charset="0"/>
+                <a:cs typeface="Arial" panose="020B0604020202020204" pitchFamily="34" charset="0"/>
+              </a:rPr>
+              <a:t>Baseline </a:t>
+            </a:r>
+            <a:r>
+              <a:rPr lang="en-US" altLang="zh-CN" sz="3200" dirty="0" err="1">
+                <a:latin typeface="Arial" panose="020B0604020202020204" pitchFamily="34" charset="0"/>
+                <a:cs typeface="Arial" panose="020B0604020202020204" pitchFamily="34" charset="0"/>
+              </a:rPr>
+              <a:t>ProCo’s</a:t>
+            </a:r>
+            <a:r>
+              <a:rPr lang="en-US" altLang="zh-CN" sz="3200" dirty="0">
+                <a:latin typeface="Arial" panose="020B0604020202020204" pitchFamily="34" charset="0"/>
+                <a:cs typeface="Arial" panose="020B0604020202020204" pitchFamily="34" charset="0"/>
+              </a:rPr>
+              <a:t> idea: </a:t>
+            </a:r>
+            <a:r>
+              <a:rPr lang="en-US" altLang="zh-CN" sz="2000" dirty="0">
+                <a:latin typeface="Arial" panose="020B0604020202020204" pitchFamily="34" charset="0"/>
+                <a:cs typeface="Arial" panose="020B0604020202020204" pitchFamily="34" charset="0"/>
+                <a:hlinkClick r:id="rId2"/>
+              </a:rPr>
+              <a:t>https://arxiv.org/pdf/2405.14092</a:t>
+            </a:r>
+            <a:endParaRPr lang="en-US" altLang="zh-CN" sz="2000" dirty="0">
+              <a:solidFill>
+                <a:srgbClr val="00B050"/>
+              </a:solidFill>
+              <a:latin typeface="Arial" panose="020B0604020202020204" pitchFamily="34" charset="0"/>
+              <a:cs typeface="Arial" panose="020B0604020202020204" pitchFamily="34" charset="0"/>
+            </a:endParaRPr>
+          </a:p>
+          <a:p>
+            <a:r>
+              <a:rPr lang="en-US" altLang="zh-CN" sz="2000" dirty="0">
+                <a:latin typeface="Arial" panose="020B0604020202020204" pitchFamily="34" charset="0"/>
+                <a:cs typeface="Arial" panose="020B0604020202020204" pitchFamily="34" charset="0"/>
+              </a:rPr>
+              <a:t>Hide the question’s key condition and use the previous answer to form a verification question; compare the verified result with the original condition.</a:t>
+            </a:r>
+          </a:p>
+          <a:p>
+            <a:r>
+              <a:rPr lang="en-US" altLang="zh-CN" sz="2000" dirty="0">
+                <a:latin typeface="Arial" panose="020B0604020202020204" pitchFamily="34" charset="0"/>
+                <a:cs typeface="Arial" panose="020B0604020202020204" pitchFamily="34" charset="0"/>
+              </a:rPr>
+              <a:t>If they match, keep the answer; if not, flag it as potentially incorrect and use it as feedback to correct the answer.</a:t>
+            </a:r>
+          </a:p>
+          <a:p>
+            <a:r>
+              <a:rPr lang="en-US" altLang="zh-CN" sz="2000" dirty="0">
+                <a:latin typeface="Arial" panose="020B0604020202020204" pitchFamily="34" charset="0"/>
+                <a:cs typeface="Arial" panose="020B0604020202020204" pitchFamily="34" charset="0"/>
+              </a:rPr>
+              <a:t>Repeat verification–correction until the answer is consistent and accurate or reach the </a:t>
+            </a:r>
+            <a:r>
+              <a:rPr lang="en-US" altLang="zh-CN" sz="2000" dirty="0" err="1">
+                <a:latin typeface="Arial" panose="020B0604020202020204" pitchFamily="34" charset="0"/>
+                <a:cs typeface="Arial" panose="020B0604020202020204" pitchFamily="34" charset="0"/>
+              </a:rPr>
+              <a:t>max_iteration</a:t>
+            </a:r>
+            <a:r>
+              <a:rPr lang="en-US" altLang="zh-CN" sz="2000" dirty="0">
+                <a:latin typeface="Arial" panose="020B0604020202020204" pitchFamily="34" charset="0"/>
+                <a:cs typeface="Arial" panose="020B0604020202020204" pitchFamily="34" charset="0"/>
+              </a:rPr>
+              <a:t>.</a:t>
+            </a:r>
+          </a:p>
+          <a:p>
+            <a:endParaRPr lang="en-US" altLang="zh-CN" sz="2000" dirty="0">
+              <a:latin typeface="Arial" panose="020B0604020202020204" pitchFamily="34" charset="0"/>
+              <a:cs typeface="Arial" panose="020B0604020202020204" pitchFamily="34" charset="0"/>
+            </a:endParaRPr>
+          </a:p>
+          <a:p>
+            <a:r>
+              <a:rPr lang="en-US" altLang="zh-CN" sz="3200" dirty="0">
+                <a:latin typeface="Arial" panose="020B0604020202020204" pitchFamily="34" charset="0"/>
+                <a:cs typeface="Arial" panose="020B0604020202020204" pitchFamily="34" charset="0"/>
+              </a:rPr>
+              <a:t>Baseline </a:t>
+            </a:r>
+            <a:r>
+              <a:rPr lang="en-US" altLang="zh-CN" sz="3200" dirty="0" err="1">
+                <a:latin typeface="Arial" panose="020B0604020202020204" pitchFamily="34" charset="0"/>
+                <a:cs typeface="Arial" panose="020B0604020202020204" pitchFamily="34" charset="0"/>
+              </a:rPr>
+              <a:t>CoVe’s</a:t>
+            </a:r>
+            <a:r>
+              <a:rPr lang="en-US" altLang="zh-CN" sz="3200" dirty="0">
+                <a:latin typeface="Arial" panose="020B0604020202020204" pitchFamily="34" charset="0"/>
+                <a:cs typeface="Arial" panose="020B0604020202020204" pitchFamily="34" charset="0"/>
+              </a:rPr>
+              <a:t> idea: </a:t>
+            </a:r>
+            <a:r>
+              <a:rPr lang="en-US" altLang="zh-CN" sz="2000" dirty="0">
+                <a:latin typeface="Arial" panose="020B0604020202020204" pitchFamily="34" charset="0"/>
+                <a:cs typeface="Arial" panose="020B0604020202020204" pitchFamily="34" charset="0"/>
+                <a:hlinkClick r:id="rId3"/>
+              </a:rPr>
+              <a:t>https://arxiv.org/pdf/2309.11495</a:t>
+            </a:r>
+            <a:endParaRPr lang="en-US" altLang="zh-CN" sz="2000" dirty="0">
+              <a:latin typeface="Arial" panose="020B0604020202020204" pitchFamily="34" charset="0"/>
+              <a:cs typeface="Arial" panose="020B0604020202020204" pitchFamily="34" charset="0"/>
+            </a:endParaRPr>
+          </a:p>
+          <a:p>
+            <a:r>
+              <a:rPr lang="en-US" altLang="zh-CN" sz="2000" dirty="0">
+                <a:latin typeface="Arial" panose="020B0604020202020204" pitchFamily="34" charset="0"/>
+                <a:cs typeface="Arial" panose="020B0604020202020204" pitchFamily="34" charset="0"/>
+              </a:rPr>
+              <a:t>Generates a set of targeted verification questions that help fact‑check different parts of its original reasoning.</a:t>
+            </a:r>
+          </a:p>
+          <a:p>
+            <a:r>
+              <a:rPr lang="en-US" altLang="zh-CN" sz="2000" dirty="0">
+                <a:latin typeface="Arial" panose="020B0604020202020204" pitchFamily="34" charset="0"/>
+                <a:cs typeface="Arial" panose="020B0604020202020204" pitchFamily="34" charset="0"/>
+              </a:rPr>
+              <a:t>Next, the LLM independently answers these verification questions, often using retrieval, and uses the verified facts to revise the original answer.</a:t>
+            </a:r>
+          </a:p>
+          <a:p>
+            <a:endParaRPr lang="en-US" altLang="zh-CN" sz="2000" dirty="0">
+              <a:latin typeface="Arial" panose="020B0604020202020204" pitchFamily="34" charset="0"/>
+              <a:cs typeface="Arial" panose="020B0604020202020204" pitchFamily="34" charset="0"/>
+            </a:endParaRPr>
+          </a:p>
+        </p:txBody>
+      </p:sp>
+    </p:spTree>
+    <p:extLst>
+      <p:ext uri="{BB962C8B-B14F-4D97-AF65-F5344CB8AC3E}">
+        <p14:creationId xmlns:p14="http://schemas.microsoft.com/office/powerpoint/2010/main" val="2825280422"/>
+      </p:ext>
+    </p:extLst>
+  </p:cSld>
+  <p:clrMapOvr>
+    <a:masterClrMapping/>
+  </p:clrMapOvr>
+</p:sld>
+</file>
+
+<file path=ppt/slides/slide3.xml><?xml version="1.0" encoding="utf-8"?>
 <p:sld xmlns:a="http://schemas.openxmlformats.org/drawingml/2006/main" xmlns:r="http://schemas.openxmlformats.org/officeDocument/2006/relationships" xmlns:p="http://schemas.openxmlformats.org/presentationml/2006/main">
   <p:cSld>
     <p:spTree>
@@ -3572,7 +3797,7 @@
         <p:spPr>
           <a:xfrm>
             <a:off x="479719" y="151179"/>
-            <a:ext cx="11219222" cy="5324535"/>
+            <a:ext cx="11219222" cy="5632311"/>
           </a:xfrm>
           <a:prstGeom prst="rect">
             <a:avLst/>
@@ -3647,19 +3872,8 @@
                 <a:latin typeface="Arial" panose="020B0604020202020204" pitchFamily="34" charset="0"/>
                 <a:cs typeface="Arial" panose="020B0604020202020204" pitchFamily="34" charset="0"/>
               </a:rPr>
-              <a:t>Randomly select about 50%(111) samples to generate hallucination base </a:t>
-            </a:r>
-            <a:r>
-              <a:rPr lang="en-US" altLang="zh-CN" sz="2000" dirty="0" err="1">
-                <a:latin typeface="Arial" panose="020B0604020202020204" pitchFamily="34" charset="0"/>
-                <a:cs typeface="Arial" panose="020B0604020202020204" pitchFamily="34" charset="0"/>
-              </a:rPr>
-              <a:t>reponse</a:t>
-            </a:r>
-            <a:endParaRPr lang="en-US" altLang="zh-CN" sz="2000" dirty="0">
-              <a:latin typeface="Arial" panose="020B0604020202020204" pitchFamily="34" charset="0"/>
-              <a:cs typeface="Arial" panose="020B0604020202020204" pitchFamily="34" charset="0"/>
-            </a:endParaRPr>
+              <a:t>Randomly select about 50%(111) samples to generate hallucination base response</a:t>
+            </a:r>
           </a:p>
           <a:p>
             <a:endParaRPr lang="en-US" altLang="zh-CN" sz="2000" b="1" dirty="0">
@@ -3941,6 +4155,18 @@
                 <a:cs typeface="Arial" panose="020B0604020202020204" pitchFamily="34" charset="0"/>
               </a:rPr>
               <a:t>hallucination</a:t>
+            </a:r>
+          </a:p>
+          <a:p>
+            <a:r>
+              <a:rPr lang="en-US" altLang="zh-CN" sz="2000" dirty="0">
+                <a:solidFill>
+                  <a:srgbClr val="FF0000"/>
+                </a:solidFill>
+                <a:latin typeface="Arial" panose="020B0604020202020204" pitchFamily="34" charset="0"/>
+                <a:cs typeface="Arial" panose="020B0604020202020204" pitchFamily="34" charset="0"/>
+              </a:rPr>
+              <a:t>(Jie: we should category 1. repaired but same meaning 2. repaired but another hallucination)</a:t>
             </a:r>
           </a:p>
           <a:p>
@@ -4133,7 +4359,7 @@
 </p:sld>
 </file>
 
-<file path=ppt/slides/slide3.xml><?xml version="1.0" encoding="utf-8"?>
+<file path=ppt/slides/slide4.xml><?xml version="1.0" encoding="utf-8"?>
 <p:sld xmlns:a="http://schemas.openxmlformats.org/drawingml/2006/main" xmlns:r="http://schemas.openxmlformats.org/officeDocument/2006/relationships" xmlns:p="http://schemas.openxmlformats.org/presentationml/2006/main">
   <p:cSld>
     <p:spTree>
@@ -4170,8 +4396,8 @@
         </p:nvSpPr>
         <p:spPr>
           <a:xfrm>
-            <a:off x="0" y="120402"/>
-            <a:ext cx="12192000" cy="6617196"/>
+            <a:off x="488956" y="0"/>
+            <a:ext cx="10890245" cy="6924973"/>
           </a:xfrm>
           <a:prstGeom prst="rect">
             <a:avLst/>
@@ -4189,7 +4415,7 @@
                 <a:latin typeface="Arial" panose="020B0604020202020204" pitchFamily="34" charset="0"/>
                 <a:cs typeface="Arial" panose="020B0604020202020204" pitchFamily="34" charset="0"/>
               </a:rPr>
-              <a:t>Experiment results:</a:t>
+              <a:t>Experiment results on gpt-4o:</a:t>
             </a:r>
           </a:p>
           <a:p>
@@ -4232,29 +4458,46 @@
                 <a:latin typeface="Arial" panose="020B0604020202020204" pitchFamily="34" charset="0"/>
                 <a:cs typeface="Arial" panose="020B0604020202020204" pitchFamily="34" charset="0"/>
               </a:rPr>
-              <a:t>Total hallucination after repair: 35/220 (50% -&gt; 15.91%) &lt;-</a:t>
-            </a:r>
-            <a:r>
-              <a:rPr lang="zh-CN" altLang="en-US" sz="2000" dirty="0">
-                <a:latin typeface="Arial" panose="020B0604020202020204" pitchFamily="34" charset="0"/>
-                <a:cs typeface="Arial" panose="020B0604020202020204" pitchFamily="34" charset="0"/>
-              </a:rPr>
-              <a:t>有几个数据传输的时候出</a:t>
-            </a:r>
-            <a:r>
-              <a:rPr lang="en-US" altLang="zh-CN" sz="2000" dirty="0">
-                <a:latin typeface="Arial" panose="020B0604020202020204" pitchFamily="34" charset="0"/>
-                <a:cs typeface="Arial" panose="020B0604020202020204" pitchFamily="34" charset="0"/>
-              </a:rPr>
-              <a:t>bug</a:t>
-            </a:r>
-            <a:r>
-              <a:rPr lang="zh-CN" altLang="en-US" sz="2000" dirty="0">
-                <a:latin typeface="Arial" panose="020B0604020202020204" pitchFamily="34" charset="0"/>
-                <a:cs typeface="Arial" panose="020B0604020202020204" pitchFamily="34" charset="0"/>
-              </a:rPr>
-              <a:t>了，于是删了</a:t>
-            </a:r>
+              <a:t>Total hallucination after repair: 35/220 (50% -&gt; 15.91%) </a:t>
+            </a:r>
+          </a:p>
+          <a:p>
+            <a:r>
+              <a:rPr lang="en-US" altLang="zh-CN" sz="2000" dirty="0">
+                <a:latin typeface="Arial" panose="020B0604020202020204" pitchFamily="34" charset="0"/>
+                <a:cs typeface="Arial" panose="020B0604020202020204" pitchFamily="34" charset="0"/>
+              </a:rPr>
+              <a:t>Hallucination repair: 92/109 (84.40%), unsuccessful repair: 9/109 (8.26%), unable repair: 8/109 (7.34%) </a:t>
+            </a:r>
+          </a:p>
+          <a:p>
+            <a:r>
+              <a:rPr lang="en-US" altLang="zh-CN" sz="2000" dirty="0">
+                <a:latin typeface="Arial" panose="020B0604020202020204" pitchFamily="34" charset="0"/>
+                <a:cs typeface="Arial" panose="020B0604020202020204" pitchFamily="34" charset="0"/>
+              </a:rPr>
+              <a:t>Unnecessary repair: 20/111 (18.02%)</a:t>
+            </a:r>
+          </a:p>
+          <a:p>
+            <a:r>
+              <a:rPr lang="en-US" altLang="zh-CN" sz="2000" dirty="0">
+                <a:latin typeface="Arial" panose="020B0604020202020204" pitchFamily="34" charset="0"/>
+                <a:cs typeface="Arial" panose="020B0604020202020204" pitchFamily="34" charset="0"/>
+              </a:rPr>
+              <a:t>Avg token cost pre question: 289.43</a:t>
+            </a:r>
+          </a:p>
+          <a:p>
+            <a:r>
+              <a:rPr lang="en-US" altLang="zh-CN" sz="2000" dirty="0">
+                <a:latin typeface="Arial" panose="020B0604020202020204" pitchFamily="34" charset="0"/>
+                <a:cs typeface="Arial" panose="020B0604020202020204" pitchFamily="34" charset="0"/>
+              </a:rPr>
+              <a:t>Avg time cost pre question: 1.4267s</a:t>
+            </a:r>
+          </a:p>
+          <a:p>
             <a:endParaRPr lang="en-US" altLang="zh-CN" sz="2000" dirty="0">
               <a:latin typeface="Arial" panose="020B0604020202020204" pitchFamily="34" charset="0"/>
               <a:cs typeface="Arial" panose="020B0604020202020204" pitchFamily="34" charset="0"/>
@@ -4262,38 +4505,56 @@
           </a:p>
           <a:p>
             <a:r>
-              <a:rPr lang="en-US" altLang="zh-CN" sz="2000" dirty="0">
-                <a:latin typeface="Arial" panose="020B0604020202020204" pitchFamily="34" charset="0"/>
-                <a:cs typeface="Arial" panose="020B0604020202020204" pitchFamily="34" charset="0"/>
-              </a:rPr>
-              <a:t>Hallucination repair: 92/109 (84.40%), unsuccessful repair: 9/109 (8.26%), unable repair: 8/109 (7.34%) </a:t>
-            </a:r>
-          </a:p>
-          <a:p>
-            <a:r>
-              <a:rPr lang="en-US" altLang="zh-CN" sz="2000" dirty="0">
-                <a:latin typeface="Arial" panose="020B0604020202020204" pitchFamily="34" charset="0"/>
-                <a:cs typeface="Arial" panose="020B0604020202020204" pitchFamily="34" charset="0"/>
-              </a:rPr>
-              <a:t>Unnecessary repair: 20/111 (18.02%)</a:t>
-            </a:r>
-          </a:p>
-          <a:p>
-            <a:r>
-              <a:rPr lang="en-US" altLang="zh-CN" sz="2000" dirty="0">
-                <a:latin typeface="Arial" panose="020B0604020202020204" pitchFamily="34" charset="0"/>
-                <a:cs typeface="Arial" panose="020B0604020202020204" pitchFamily="34" charset="0"/>
-              </a:rPr>
-              <a:t>Avg token cost pre question: 289.43</a:t>
-            </a:r>
-          </a:p>
-          <a:p>
-            <a:r>
-              <a:rPr lang="en-US" altLang="zh-CN" sz="2000" dirty="0">
-                <a:latin typeface="Arial" panose="020B0604020202020204" pitchFamily="34" charset="0"/>
-                <a:cs typeface="Arial" panose="020B0604020202020204" pitchFamily="34" charset="0"/>
-              </a:rPr>
-              <a:t>Avg time cost pre question: 1.4267s</a:t>
+              <a:rPr lang="en-US" altLang="zh-CN" sz="2000" b="1" dirty="0">
+                <a:latin typeface="Arial" panose="020B0604020202020204" pitchFamily="34" charset="0"/>
+                <a:cs typeface="Arial" panose="020B0604020202020204" pitchFamily="34" charset="0"/>
+              </a:rPr>
+              <a:t>ProCo-single iteration</a:t>
+            </a:r>
+          </a:p>
+          <a:p>
+            <a:r>
+              <a:rPr lang="en-US" altLang="zh-CN" sz="2000" dirty="0">
+                <a:latin typeface="Arial" panose="020B0604020202020204" pitchFamily="34" charset="0"/>
+                <a:cs typeface="Arial" panose="020B0604020202020204" pitchFamily="34" charset="0"/>
+              </a:rPr>
+              <a:t>Total hallucination after repair: 89/224 (50%-&gt; 39.73%)</a:t>
+            </a:r>
+          </a:p>
+          <a:p>
+            <a:r>
+              <a:rPr lang="en-US" altLang="zh-CN" sz="2000" dirty="0">
+                <a:latin typeface="Arial" panose="020B0604020202020204" pitchFamily="34" charset="0"/>
+                <a:cs typeface="Arial" panose="020B0604020202020204" pitchFamily="34" charset="0"/>
+              </a:rPr>
+              <a:t>Hallucination repair: 54/111 (48.65%), unsuccessful repair: 57/111 (51.35%)</a:t>
+            </a:r>
+          </a:p>
+          <a:p>
+            <a:r>
+              <a:rPr lang="en-US" altLang="zh-CN" sz="2000" dirty="0">
+                <a:latin typeface="Arial" panose="020B0604020202020204" pitchFamily="34" charset="0"/>
+                <a:cs typeface="Arial" panose="020B0604020202020204" pitchFamily="34" charset="0"/>
+              </a:rPr>
+              <a:t>Unnecessary repair: 32/113 (28.32%)</a:t>
+            </a:r>
+          </a:p>
+          <a:p>
+            <a:r>
+              <a:rPr lang="en-US" altLang="zh-CN" sz="2000" dirty="0">
+                <a:latin typeface="Arial" panose="020B0604020202020204" pitchFamily="34" charset="0"/>
+                <a:cs typeface="Arial" panose="020B0604020202020204" pitchFamily="34" charset="0"/>
+              </a:rPr>
+              <a:t>Avg token cost pre question: 2560.37</a:t>
+            </a:r>
+          </a:p>
+          <a:p>
+            <a:r>
+              <a:rPr lang="en-US" altLang="zh-CN" sz="2000" dirty="0">
+                <a:latin typeface="Arial" panose="020B0604020202020204" pitchFamily="34" charset="0"/>
+                <a:cs typeface="Arial" panose="020B0604020202020204" pitchFamily="34" charset="0"/>
+              </a:rPr>
+              <a:t>Avg time cost pre question: 20.6160s</a:t>
             </a:r>
           </a:p>
           <a:p>
@@ -4308,77 +4569,6 @@
                 <a:latin typeface="Arial" panose="020B0604020202020204" pitchFamily="34" charset="0"/>
                 <a:cs typeface="Arial" panose="020B0604020202020204" pitchFamily="34" charset="0"/>
               </a:rPr>
-              <a:t>ProCo-single iteration</a:t>
-            </a:r>
-          </a:p>
-          <a:p>
-            <a:r>
-              <a:rPr lang="en-US" altLang="zh-CN" sz="2000" dirty="0">
-                <a:latin typeface="Arial" panose="020B0604020202020204" pitchFamily="34" charset="0"/>
-                <a:cs typeface="Arial" panose="020B0604020202020204" pitchFamily="34" charset="0"/>
-              </a:rPr>
-              <a:t>Total hallucination after repair: 89/224 (50%-&gt; 39.73%)</a:t>
-            </a:r>
-          </a:p>
-          <a:p>
-            <a:r>
-              <a:rPr lang="en-US" altLang="zh-CN" sz="2000" dirty="0">
-                <a:latin typeface="Arial" panose="020B0604020202020204" pitchFamily="34" charset="0"/>
-                <a:cs typeface="Arial" panose="020B0604020202020204" pitchFamily="34" charset="0"/>
-              </a:rPr>
-              <a:t>Hallucination repair: 54/111 (48.65%), unsuccessful repair: 57/111 (51.35%) &lt;-</a:t>
-            </a:r>
-            <a:r>
-              <a:rPr lang="zh-CN" altLang="en-US" sz="2000" dirty="0">
-                <a:latin typeface="Arial" panose="020B0604020202020204" pitchFamily="34" charset="0"/>
-                <a:cs typeface="Arial" panose="020B0604020202020204" pitchFamily="34" charset="0"/>
-              </a:rPr>
-              <a:t>这部分没分开统计</a:t>
-            </a:r>
-            <a:endParaRPr lang="en-US" altLang="zh-CN" sz="2000" dirty="0">
-              <a:latin typeface="Arial" panose="020B0604020202020204" pitchFamily="34" charset="0"/>
-              <a:cs typeface="Arial" panose="020B0604020202020204" pitchFamily="34" charset="0"/>
-            </a:endParaRPr>
-          </a:p>
-          <a:p>
-            <a:r>
-              <a:rPr lang="en-US" altLang="zh-CN" sz="2000" dirty="0">
-                <a:latin typeface="Arial" panose="020B0604020202020204" pitchFamily="34" charset="0"/>
-                <a:cs typeface="Arial" panose="020B0604020202020204" pitchFamily="34" charset="0"/>
-              </a:rPr>
-              <a:t>Unnecessary repair: 32/113 (28.32%)</a:t>
-            </a:r>
-          </a:p>
-          <a:p>
-            <a:r>
-              <a:rPr lang="en-US" altLang="zh-CN" sz="2000" dirty="0">
-                <a:latin typeface="Arial" panose="020B0604020202020204" pitchFamily="34" charset="0"/>
-                <a:cs typeface="Arial" panose="020B0604020202020204" pitchFamily="34" charset="0"/>
-              </a:rPr>
-              <a:t>Avg token cost pre question: 2560.37</a:t>
-            </a:r>
-          </a:p>
-          <a:p>
-            <a:r>
-              <a:rPr lang="en-US" altLang="zh-CN" sz="2000" dirty="0">
-                <a:latin typeface="Arial" panose="020B0604020202020204" pitchFamily="34" charset="0"/>
-                <a:cs typeface="Arial" panose="020B0604020202020204" pitchFamily="34" charset="0"/>
-              </a:rPr>
-              <a:t>Avg time cost pre question: 20.6160s</a:t>
-            </a:r>
-          </a:p>
-          <a:p>
-            <a:endParaRPr lang="en-US" altLang="zh-CN" sz="2000" dirty="0">
-              <a:latin typeface="Arial" panose="020B0604020202020204" pitchFamily="34" charset="0"/>
-              <a:cs typeface="Arial" panose="020B0604020202020204" pitchFamily="34" charset="0"/>
-            </a:endParaRPr>
-          </a:p>
-          <a:p>
-            <a:r>
-              <a:rPr lang="en-US" altLang="zh-CN" sz="2000" b="1" dirty="0">
-                <a:latin typeface="Arial" panose="020B0604020202020204" pitchFamily="34" charset="0"/>
-                <a:cs typeface="Arial" panose="020B0604020202020204" pitchFamily="34" charset="0"/>
-              </a:rPr>
               <a:t>ProCo-3 iterations</a:t>
             </a:r>
           </a:p>
@@ -4397,33 +4587,17 @@
                 <a:latin typeface="Arial" panose="020B0604020202020204" pitchFamily="34" charset="0"/>
                 <a:cs typeface="Arial" panose="020B0604020202020204" pitchFamily="34" charset="0"/>
               </a:rPr>
-              <a:t>Hallucination repair: 45/112 (40.54%), unsuccessful repair: 66/111 (59.46%)&lt;-</a:t>
-            </a:r>
-            <a:r>
-              <a:rPr lang="zh-CN" altLang="en-US" sz="2000" dirty="0">
-                <a:latin typeface="Arial" panose="020B0604020202020204" pitchFamily="34" charset="0"/>
-                <a:cs typeface="Arial" panose="020B0604020202020204" pitchFamily="34" charset="0"/>
-              </a:rPr>
-              <a:t>感觉是运气不好，之前实验</a:t>
-            </a:r>
-            <a:r>
-              <a:rPr lang="en-US" altLang="zh-CN" sz="2000" dirty="0">
-                <a:latin typeface="Arial" panose="020B0604020202020204" pitchFamily="34" charset="0"/>
-                <a:cs typeface="Arial" panose="020B0604020202020204" pitchFamily="34" charset="0"/>
-              </a:rPr>
-              <a:t>Unnecessary repair: 26/113 (23.01%)                                                                </a:t>
-            </a:r>
-            <a:r>
-              <a:rPr lang="zh-CN" altLang="en-US" sz="2000" dirty="0">
-                <a:latin typeface="Arial" panose="020B0604020202020204" pitchFamily="34" charset="0"/>
-                <a:cs typeface="Arial" panose="020B0604020202020204" pitchFamily="34" charset="0"/>
-              </a:rPr>
-              <a:t>结果会比单次迭代好一点</a:t>
-            </a:r>
-            <a:endParaRPr lang="en-US" altLang="zh-CN" sz="2000" dirty="0">
-              <a:latin typeface="Arial" panose="020B0604020202020204" pitchFamily="34" charset="0"/>
-              <a:cs typeface="Arial" panose="020B0604020202020204" pitchFamily="34" charset="0"/>
-            </a:endParaRPr>
+              <a:t>Hallucination repair: 45/112 (40.54%), unsuccessful repair: 66/111 (59.46%)</a:t>
+            </a:r>
+          </a:p>
+          <a:p>
+            <a:r>
+              <a:rPr lang="en-US" altLang="zh-CN" sz="2000" dirty="0">
+                <a:latin typeface="Arial" panose="020B0604020202020204" pitchFamily="34" charset="0"/>
+                <a:cs typeface="Arial" panose="020B0604020202020204" pitchFamily="34" charset="0"/>
+              </a:rPr>
+              <a:t>Unnecessary repair: 26/113 (23.01%) </a:t>
+            </a:r>
           </a:p>
           <a:p>
             <a:r>
@@ -4440,21 +4614,7 @@
                 <a:latin typeface="Arial" panose="020B0604020202020204" pitchFamily="34" charset="0"/>
                 <a:cs typeface="Arial" panose="020B0604020202020204" pitchFamily="34" charset="0"/>
               </a:rPr>
-              <a:t>Avg time cost pre question: 143.3823s &lt;-</a:t>
-            </a:r>
-            <a:r>
-              <a:rPr lang="zh-CN" altLang="en-US" sz="2000" dirty="0">
-                <a:latin typeface="Arial" panose="020B0604020202020204" pitchFamily="34" charset="0"/>
-                <a:cs typeface="Arial" panose="020B0604020202020204" pitchFamily="34" charset="0"/>
-              </a:rPr>
-              <a:t>跑的时候网络卡了，可能不准，大概是</a:t>
-            </a:r>
-            <a:r>
-              <a:rPr lang="en-US" altLang="zh-CN" sz="2000" dirty="0">
-                <a:latin typeface="Arial" panose="020B0604020202020204" pitchFamily="34" charset="0"/>
-                <a:cs typeface="Arial" panose="020B0604020202020204" pitchFamily="34" charset="0"/>
-              </a:rPr>
-              <a:t>40-50</a:t>
+              <a:t>Avg time cost pre question: 143.3823s</a:t>
             </a:r>
           </a:p>
         </p:txBody>
@@ -4472,7 +4632,7 @@
 </p:sld>
 </file>
 
-<file path=ppt/slides/slide4.xml><?xml version="1.0" encoding="utf-8"?>
+<file path=ppt/slides/slide5.xml><?xml version="1.0" encoding="utf-8"?>
 <p:sld xmlns:a="http://schemas.openxmlformats.org/drawingml/2006/main" xmlns:r="http://schemas.openxmlformats.org/officeDocument/2006/relationships" xmlns:p="http://schemas.openxmlformats.org/presentationml/2006/main">
   <p:cSld>
     <p:spTree>
@@ -4510,7 +4670,7 @@
         <p:spPr>
           <a:xfrm>
             <a:off x="479719" y="151179"/>
-            <a:ext cx="11232562" cy="4770537"/>
+            <a:ext cx="11232562" cy="4154984"/>
           </a:xfrm>
           <a:prstGeom prst="rect">
             <a:avLst/>
@@ -4552,7 +4712,7 @@
                 <a:latin typeface="Arial" panose="020B0604020202020204" pitchFamily="34" charset="0"/>
                 <a:cs typeface="Arial" panose="020B0604020202020204" pitchFamily="34" charset="0"/>
               </a:rPr>
-              <a:t>The source code of </a:t>
+              <a:t>Experiments on new baseline </a:t>
             </a:r>
             <a:r>
               <a:rPr lang="en-US" altLang="zh-CN" sz="2000" dirty="0" err="1">
@@ -4566,7 +4726,7 @@
                 <a:latin typeface="Arial" panose="020B0604020202020204" pitchFamily="34" charset="0"/>
                 <a:cs typeface="Arial" panose="020B0604020202020204" pitchFamily="34" charset="0"/>
               </a:rPr>
-              <a:t> (from the paper Chain-of-Verification Reduces Hallucination in Large Language Models, Meta AI) has been deployed, and I’m currently running it as another baseline, expect to obtain the results by Friday.</a:t>
+              <a:t> (from the paper Chain-of-Verification Reduces Hallucination in Large Language Models, Meta AI) has been done.</a:t>
             </a:r>
           </a:p>
           <a:p>
@@ -4574,91 +4734,73 @@
               <a:buAutoNum type="arabicPeriod"/>
             </a:pPr>
             <a:r>
-              <a:rPr lang="en-US" altLang="zh-CN" sz="2000" dirty="0" err="1">
-                <a:latin typeface="Arial" panose="020B0604020202020204" pitchFamily="34" charset="0"/>
-                <a:cs typeface="Arial" panose="020B0604020202020204" pitchFamily="34" charset="0"/>
-              </a:rPr>
-              <a:t>ProgCo</a:t>
-            </a:r>
-            <a:r>
-              <a:rPr lang="en-US" altLang="zh-CN" sz="2000" dirty="0">
-                <a:latin typeface="Arial" panose="020B0604020202020204" pitchFamily="34" charset="0"/>
-                <a:cs typeface="Arial" panose="020B0604020202020204" pitchFamily="34" charset="0"/>
-              </a:rPr>
-              <a:t>(from paper: </a:t>
-            </a:r>
-            <a:r>
-              <a:rPr lang="en-US" altLang="zh-CN" sz="2000" dirty="0" err="1">
-                <a:latin typeface="Arial" panose="020B0604020202020204" pitchFamily="34" charset="0"/>
-                <a:cs typeface="Arial" panose="020B0604020202020204" pitchFamily="34" charset="0"/>
-              </a:rPr>
-              <a:t>ProgCo</a:t>
-            </a:r>
-            <a:r>
-              <a:rPr lang="en-US" altLang="zh-CN" sz="2000" dirty="0">
-                <a:latin typeface="Arial" panose="020B0604020202020204" pitchFamily="34" charset="0"/>
-                <a:cs typeface="Arial" panose="020B0604020202020204" pitchFamily="34" charset="0"/>
-              </a:rPr>
-              <a:t>: Program Helps Self-Correction of Large Language Models, </a:t>
+              <a:rPr lang="en-US" altLang="zh-CN" sz="2000" dirty="0">
+                <a:latin typeface="Arial" panose="020B0604020202020204" pitchFamily="34" charset="0"/>
+                <a:cs typeface="Arial" panose="020B0604020202020204" pitchFamily="34" charset="0"/>
+              </a:rPr>
+              <a:t>Most recent methods rely on RAG or other external resources. In contrast, we could tell story that our approach focuses on </a:t>
             </a:r>
             <a:r>
               <a:rPr lang="en-US" altLang="zh-CN" sz="2000" b="1" dirty="0">
                 <a:latin typeface="Arial" panose="020B0604020202020204" pitchFamily="34" charset="0"/>
                 <a:cs typeface="Arial" panose="020B0604020202020204" pitchFamily="34" charset="0"/>
               </a:rPr>
-              <a:t>ACL 2025</a:t>
-            </a:r>
-            <a:r>
-              <a:rPr lang="en-US" altLang="zh-CN" sz="2000" dirty="0">
-                <a:latin typeface="Arial" panose="020B0604020202020204" pitchFamily="34" charset="0"/>
-                <a:cs typeface="Arial" panose="020B0604020202020204" pitchFamily="34" charset="0"/>
-              </a:rPr>
-              <a:t>) we could also try this method as baseline, they use program verification for their verify process; however, their codes are hard to read and modify(working on that).</a:t>
+              <a:t>zero-resource</a:t>
+            </a:r>
+            <a:r>
+              <a:rPr lang="en-US" altLang="zh-CN" sz="2000" dirty="0">
+                <a:latin typeface="Arial" panose="020B0604020202020204" pitchFamily="34" charset="0"/>
+                <a:cs typeface="Arial" panose="020B0604020202020204" pitchFamily="34" charset="0"/>
+              </a:rPr>
+              <a:t> self-correction(self-repair), a direction that has received little attention in recent years.</a:t>
             </a:r>
           </a:p>
           <a:p>
             <a:pPr marL="457200" indent="-457200">
+              <a:buFontTx/>
               <a:buAutoNum type="arabicPeriod"/>
             </a:pPr>
             <a:r>
-              <a:rPr lang="en-US" altLang="zh-CN" sz="2000" dirty="0">
-                <a:latin typeface="Arial" panose="020B0604020202020204" pitchFamily="34" charset="0"/>
-                <a:cs typeface="Arial" panose="020B0604020202020204" pitchFamily="34" charset="0"/>
-              </a:rPr>
-              <a:t>Most recent methods rely on RAG or other external resources. In contrast, we could tell story that our approach focuses on </a:t>
-            </a:r>
-            <a:r>
-              <a:rPr lang="en-US" altLang="zh-CN" sz="2000" b="1">
-                <a:latin typeface="Arial" panose="020B0604020202020204" pitchFamily="34" charset="0"/>
-                <a:cs typeface="Arial" panose="020B0604020202020204" pitchFamily="34" charset="0"/>
-              </a:rPr>
-              <a:t>zero-resource</a:t>
-            </a:r>
-            <a:r>
-              <a:rPr lang="en-US" altLang="zh-CN" sz="2000">
-                <a:latin typeface="Arial" panose="020B0604020202020204" pitchFamily="34" charset="0"/>
-                <a:cs typeface="Arial" panose="020B0604020202020204" pitchFamily="34" charset="0"/>
-              </a:rPr>
-              <a:t> self-correction, </a:t>
-            </a:r>
-            <a:r>
-              <a:rPr lang="en-US" altLang="zh-CN" sz="2000" dirty="0">
-                <a:latin typeface="Arial" panose="020B0604020202020204" pitchFamily="34" charset="0"/>
-                <a:cs typeface="Arial" panose="020B0604020202020204" pitchFamily="34" charset="0"/>
-              </a:rPr>
-              <a:t>a direction that has received little attention in recent years.</a:t>
-            </a:r>
-          </a:p>
-          <a:p>
-            <a:pPr marL="457200" indent="-457200">
-              <a:buAutoNum type="arabicPeriod"/>
-            </a:pPr>
-            <a:r>
-              <a:rPr lang="en-US" altLang="zh-CN" sz="2000" dirty="0">
-                <a:latin typeface="Arial" panose="020B0604020202020204" pitchFamily="34" charset="0"/>
-                <a:cs typeface="Arial" panose="020B0604020202020204" pitchFamily="34" charset="0"/>
-              </a:rPr>
-              <a:t>Run comparison experiment on gpt-5 with and without auto-thinking</a:t>
+              <a:rPr lang="en-US" altLang="zh-CN" sz="2000" dirty="0" err="1">
+                <a:latin typeface="Arial" panose="020B0604020202020204" pitchFamily="34" charset="0"/>
+                <a:cs typeface="Arial" panose="020B0604020202020204" pitchFamily="34" charset="0"/>
+              </a:rPr>
+              <a:t>ProgCo</a:t>
+            </a:r>
+            <a:r>
+              <a:rPr lang="en-US" altLang="zh-CN" sz="2000" dirty="0">
+                <a:latin typeface="Arial" panose="020B0604020202020204" pitchFamily="34" charset="0"/>
+                <a:cs typeface="Arial" panose="020B0604020202020204" pitchFamily="34" charset="0"/>
+              </a:rPr>
+              <a:t>(from paper: </a:t>
+            </a:r>
+            <a:r>
+              <a:rPr lang="en-US" altLang="zh-CN" sz="2000" dirty="0" err="1">
+                <a:latin typeface="Arial" panose="020B0604020202020204" pitchFamily="34" charset="0"/>
+                <a:cs typeface="Arial" panose="020B0604020202020204" pitchFamily="34" charset="0"/>
+              </a:rPr>
+              <a:t>ProgCo</a:t>
+            </a:r>
+            <a:r>
+              <a:rPr lang="en-US" altLang="zh-CN" sz="2000" dirty="0">
+                <a:latin typeface="Arial" panose="020B0604020202020204" pitchFamily="34" charset="0"/>
+                <a:cs typeface="Arial" panose="020B0604020202020204" pitchFamily="34" charset="0"/>
+              </a:rPr>
+              <a:t>: Program Helps Self-Correction of Large Language Models, </a:t>
+            </a:r>
+            <a:r>
+              <a:rPr lang="en-US" altLang="zh-CN" sz="2000" b="1" dirty="0">
+                <a:latin typeface="Arial" panose="020B0604020202020204" pitchFamily="34" charset="0"/>
+                <a:cs typeface="Arial" panose="020B0604020202020204" pitchFamily="34" charset="0"/>
+              </a:rPr>
+              <a:t>ACL 2025</a:t>
+            </a:r>
+            <a:r>
+              <a:rPr lang="en-US" altLang="zh-CN" sz="2000" dirty="0">
+                <a:latin typeface="Arial" panose="020B0604020202020204" pitchFamily="34" charset="0"/>
+                <a:cs typeface="Arial" panose="020B0604020202020204" pitchFamily="34" charset="0"/>
+              </a:rPr>
+              <a:t>) we could also try this method as baseline, they use program verification for their verify process; however, their codes are hard to read and modify(working on that).</a:t>
             </a:r>
           </a:p>
         </p:txBody>
